--- a/data-architecture/Data_Quality_Issues_Log.pptx
+++ b/data-architecture/Data_Quality_Issues_Log.pptx
@@ -508,6 +508,7 @@
 3. UnitE sends data out automatically but gets it back by hand, and nothing says which system wins.
 4. Commercial students and apprentices may be missing from college totals, because Dante, Onefile, JTL and Dataserve are not connected to UnitE or the SQL connector.
 The medium-priority issues are about feeds that bypass the connector, partial bursary data, the lack of status history, and student systems we have not yet mapped.
+Possible causes (in italics) are my reading of the map and meeting notes; confirm them with each system owner. Most come back to two root causes: systems were bought team by team without automated links, and nobody owns the master copy of each data item.
 The single most useful next step is to agree one system of record for each key data item, as part of Lesley and Kevin's single source work.</a:t>
             </a:r>
             <a:endParaRPr lang="en-US" dirty="0"/>
@@ -976,12 +977,13 @@
             <a:tbl>
               <a:tblPr/>
               <a:tblGrid>
-                <a:gridCol w="347472"/>
+                <a:gridCol w="301752"/>
+                <a:gridCol w="1463040"/>
+                <a:gridCol w="2606040"/>
+                <a:gridCol w="2423160"/>
+                <a:gridCol w="2057400"/>
                 <a:gridCol w="1920240"/>
-                <a:gridCol w="3429000"/>
-                <a:gridCol w="2606040"/>
-                <a:gridCol w="2331720"/>
-                <a:gridCol w="822960"/>
+                <a:gridCol w="685800"/>
               </a:tblGrid>
               <a:tr h="310896">
                 <a:tc>
@@ -1205,6 +1207,74 @@
                           <a:ea typeface="Calibri" pitchFamily="34" charset="-122"/>
                           <a:cs typeface="Calibri" pitchFamily="34" charset="-120"/>
                         </a:rPr>
+                        <a:t>Possible cause</a:t>
+                      </a:r>
+                      <a:endParaRPr lang="en-US" sz="1050" dirty="0">
+                        <a:latin typeface="Calibri" charset="0"/>
+                        <a:ea typeface="Calibri" charset="0"/>
+                        <a:cs typeface="Calibri" charset="0"/>
+                      </a:endParaRPr>
+                    </a:p>
+                  </a:txBody>
+                  <a:tcPr marL="54864" marR="54864" marT="27432" marB="27432" anchor="ctr">
+                    <a:lnL w="6350" cap="flat" cmpd="sng" algn="ctr">
+                      <a:solidFill>
+                        <a:srgbClr val="D9D4E3"/>
+                      </a:solidFill>
+                      <a:prstDash val="solid"/>
+                      <a:round/>
+                      <a:headEnd type="none" w="med" len="med"/>
+                      <a:tailEnd type="none" w="med" len="med"/>
+                    </a:lnL>
+                    <a:lnR w="6350" cap="flat" cmpd="sng" algn="ctr">
+                      <a:solidFill>
+                        <a:srgbClr val="D9D4E3"/>
+                      </a:solidFill>
+                      <a:prstDash val="solid"/>
+                      <a:round/>
+                      <a:headEnd type="none" w="med" len="med"/>
+                      <a:tailEnd type="none" w="med" len="med"/>
+                    </a:lnR>
+                    <a:lnT w="6350" cap="flat" cmpd="sng" algn="ctr">
+                      <a:solidFill>
+                        <a:srgbClr val="D9D4E3"/>
+                      </a:solidFill>
+                      <a:prstDash val="solid"/>
+                      <a:round/>
+                      <a:headEnd type="none" w="med" len="med"/>
+                      <a:tailEnd type="none" w="med" len="med"/>
+                    </a:lnT>
+                    <a:lnB w="6350" cap="flat" cmpd="sng" algn="ctr">
+                      <a:solidFill>
+                        <a:srgbClr val="D9D4E3"/>
+                      </a:solidFill>
+                      <a:prstDash val="solid"/>
+                      <a:round/>
+                      <a:headEnd type="none" w="med" len="med"/>
+                      <a:tailEnd type="none" w="med" len="med"/>
+                    </a:lnB>
+                    <a:solidFill>
+                      <a:srgbClr val="2B2350"/>
+                    </a:solidFill>
+                  </a:tcPr>
+                </a:tc>
+                <a:tc>
+                  <a:txBody>
+                    <a:bodyPr/>
+                    <a:lstStyle/>
+                    <a:p>
+                      <a:pPr indent="0" marL="0">
+                        <a:buNone/>
+                      </a:pPr>
+                      <a:r>
+                        <a:rPr lang="en-US" sz="1050" b="1" dirty="0">
+                          <a:solidFill>
+                            <a:srgbClr val="FFFFFF"/>
+                          </a:solidFill>
+                          <a:latin typeface="Calibri" pitchFamily="34" charset="0"/>
+                          <a:ea typeface="Calibri" pitchFamily="34" charset="-122"/>
+                          <a:cs typeface="Calibri" pitchFamily="34" charset="-120"/>
+                        </a:rPr>
                         <a:t>Effect on BI</a:t>
                       </a:r>
                       <a:endParaRPr lang="en-US" sz="1050" dirty="0">
@@ -1403,7 +1473,7 @@
                         <a:buNone/>
                       </a:pPr>
                       <a:r>
-                        <a:rPr lang="en-US" sz="950" b="1" dirty="0">
+                        <a:rPr lang="en-US" sz="900" b="1" dirty="0">
                           <a:solidFill>
                             <a:srgbClr val="A3206E"/>
                           </a:solidFill>
@@ -1413,7 +1483,7 @@
                         </a:rPr>
                         <a:t>1</a:t>
                       </a:r>
-                      <a:endParaRPr lang="en-US" sz="950" dirty="0">
+                      <a:endParaRPr lang="en-US" sz="900" dirty="0">
                         <a:latin typeface="Calibri" charset="0"/>
                         <a:ea typeface="Calibri" charset="0"/>
                         <a:cs typeface="Calibri" charset="0"/>
@@ -1471,7 +1541,7 @@
                         <a:buNone/>
                       </a:pPr>
                       <a:r>
-                        <a:rPr lang="en-US" sz="950" b="1" dirty="0">
+                        <a:rPr lang="en-US" sz="900" b="1" dirty="0">
                           <a:solidFill>
                             <a:srgbClr val="2B2350"/>
                           </a:solidFill>
@@ -1481,7 +1551,7 @@
                         </a:rPr>
                         <a:t>Same data keyed into several systems</a:t>
                       </a:r>
-                      <a:endParaRPr lang="en-US" sz="950" dirty="0">
+                      <a:endParaRPr lang="en-US" sz="900" dirty="0">
                         <a:latin typeface="Calibri" charset="0"/>
                         <a:ea typeface="Calibri" charset="0"/>
                         <a:cs typeface="Calibri" charset="0"/>
@@ -1539,7 +1609,7 @@
                         <a:buNone/>
                       </a:pPr>
                       <a:r>
-                        <a:rPr lang="en-US" sz="950" dirty="0">
+                        <a:rPr lang="en-US" sz="900" dirty="0">
                           <a:solidFill>
                             <a:srgbClr val="1F2233"/>
                           </a:solidFill>
@@ -1549,7 +1619,7 @@
                         </a:rPr>
                         <a:t>ASN typed into Enquirer, FVC Portal and TripleS. Application status and interview detail typed into both Enquirer and UnitE</a:t>
                       </a:r>
-                      <a:endParaRPr lang="en-US" sz="950" dirty="0">
+                      <a:endParaRPr lang="en-US" sz="900" dirty="0">
                         <a:latin typeface="Calibri" charset="0"/>
                         <a:ea typeface="Calibri" charset="0"/>
                         <a:cs typeface="Calibri" charset="0"/>
@@ -1607,7 +1677,7 @@
                         <a:buNone/>
                       </a:pPr>
                       <a:r>
-                        <a:rPr lang="en-US" sz="950" dirty="0">
+                        <a:rPr lang="en-US" sz="900" i="1" dirty="0">
                           <a:solidFill>
                             <a:srgbClr val="1F2233"/>
                           </a:solidFill>
@@ -1615,9 +1685,9 @@
                           <a:ea typeface="Calibri" pitchFamily="34" charset="-122"/>
                           <a:cs typeface="Calibri" pitchFamily="34" charset="-120"/>
                         </a:rPr>
-                        <a:t>Two versions of one number reach Power BI. May explain the RA5 gap (37.9% vs 31.0% / 54.5%)</a:t>
-                      </a:r>
-                      <a:endParaRPr lang="en-US" sz="950" dirty="0">
+                        <a:t>Each team works in its own system (admissions, registry, support, schools) and no one owns the master copy of each item</a:t>
+                      </a:r>
+                      <a:endParaRPr lang="en-US" sz="900" dirty="0">
                         <a:latin typeface="Calibri" charset="0"/>
                         <a:ea typeface="Calibri" charset="0"/>
                         <a:cs typeface="Calibri" charset="0"/>
@@ -1675,7 +1745,7 @@
                         <a:buNone/>
                       </a:pPr>
                       <a:r>
-                        <a:rPr lang="en-US" sz="950" dirty="0">
+                        <a:rPr lang="en-US" sz="900" dirty="0">
                           <a:solidFill>
                             <a:srgbClr val="1F2233"/>
                           </a:solidFill>
@@ -1683,9 +1753,77 @@
                           <a:ea typeface="Calibri" pitchFamily="34" charset="-122"/>
                           <a:cs typeface="Calibri" pitchFamily="34" charset="-120"/>
                         </a:rPr>
+                        <a:t>Two versions of one number reach Power BI; may explain the RA5 gap (37.9% vs 31.0% / 54.5%)</a:t>
+                      </a:r>
+                      <a:endParaRPr lang="en-US" sz="900" dirty="0">
+                        <a:latin typeface="Calibri" charset="0"/>
+                        <a:ea typeface="Calibri" charset="0"/>
+                        <a:cs typeface="Calibri" charset="0"/>
+                      </a:endParaRPr>
+                    </a:p>
+                  </a:txBody>
+                  <a:tcPr marL="54864" marR="54864" marT="27432" marB="27432" anchor="ctr">
+                    <a:lnL w="6350" cap="flat" cmpd="sng" algn="ctr">
+                      <a:solidFill>
+                        <a:srgbClr val="D9D4E3"/>
+                      </a:solidFill>
+                      <a:prstDash val="solid"/>
+                      <a:round/>
+                      <a:headEnd type="none" w="med" len="med"/>
+                      <a:tailEnd type="none" w="med" len="med"/>
+                    </a:lnL>
+                    <a:lnR w="6350" cap="flat" cmpd="sng" algn="ctr">
+                      <a:solidFill>
+                        <a:srgbClr val="D9D4E3"/>
+                      </a:solidFill>
+                      <a:prstDash val="solid"/>
+                      <a:round/>
+                      <a:headEnd type="none" w="med" len="med"/>
+                      <a:tailEnd type="none" w="med" len="med"/>
+                    </a:lnR>
+                    <a:lnT w="6350" cap="flat" cmpd="sng" algn="ctr">
+                      <a:solidFill>
+                        <a:srgbClr val="D9D4E3"/>
+                      </a:solidFill>
+                      <a:prstDash val="solid"/>
+                      <a:round/>
+                      <a:headEnd type="none" w="med" len="med"/>
+                      <a:tailEnd type="none" w="med" len="med"/>
+                    </a:lnT>
+                    <a:lnB w="6350" cap="flat" cmpd="sng" algn="ctr">
+                      <a:solidFill>
+                        <a:srgbClr val="D9D4E3"/>
+                      </a:solidFill>
+                      <a:prstDash val="solid"/>
+                      <a:round/>
+                      <a:headEnd type="none" w="med" len="med"/>
+                      <a:tailEnd type="none" w="med" len="med"/>
+                    </a:lnB>
+                    <a:solidFill>
+                      <a:srgbClr val="FFFFFF"/>
+                    </a:solidFill>
+                  </a:tcPr>
+                </a:tc>
+                <a:tc>
+                  <a:txBody>
+                    <a:bodyPr/>
+                    <a:lstStyle/>
+                    <a:p>
+                      <a:pPr indent="0" marL="0">
+                        <a:buNone/>
+                      </a:pPr>
+                      <a:r>
+                        <a:rPr lang="en-US" sz="900" dirty="0">
+                          <a:solidFill>
+                            <a:srgbClr val="1F2233"/>
+                          </a:solidFill>
+                          <a:latin typeface="Calibri" pitchFamily="34" charset="0"/>
+                          <a:ea typeface="Calibri" pitchFamily="34" charset="-122"/>
+                          <a:cs typeface="Calibri" pitchFamily="34" charset="-120"/>
+                        </a:rPr>
                         <a:t>Agree one system of record per data item (Lesley, Kevin)</a:t>
                       </a:r>
-                      <a:endParaRPr lang="en-US" sz="950" dirty="0">
+                      <a:endParaRPr lang="en-US" sz="900" dirty="0">
                         <a:latin typeface="Calibri" charset="0"/>
                         <a:ea typeface="Calibri" charset="0"/>
                         <a:cs typeface="Calibri" charset="0"/>
@@ -1743,7 +1881,7 @@
                         <a:buNone/>
                       </a:pPr>
                       <a:r>
-                        <a:rPr lang="en-US" sz="950" b="1" dirty="0">
+                        <a:rPr lang="en-US" sz="900" b="1" dirty="0">
                           <a:solidFill>
                             <a:srgbClr val="8C1A5C"/>
                           </a:solidFill>
@@ -1753,7 +1891,7 @@
                         </a:rPr>
                         <a:t>High</a:t>
                       </a:r>
-                      <a:endParaRPr lang="en-US" sz="950" dirty="0">
+                      <a:endParaRPr lang="en-US" sz="900" dirty="0">
                         <a:latin typeface="Calibri" charset="0"/>
                         <a:ea typeface="Calibri" charset="0"/>
                         <a:cs typeface="Calibri" charset="0"/>
@@ -1813,7 +1951,7 @@
                         <a:buNone/>
                       </a:pPr>
                       <a:r>
-                        <a:rPr lang="en-US" sz="950" b="1" dirty="0">
+                        <a:rPr lang="en-US" sz="900" b="1" dirty="0">
                           <a:solidFill>
                             <a:srgbClr val="A3206E"/>
                           </a:solidFill>
@@ -1823,7 +1961,7 @@
                         </a:rPr>
                         <a:t>2</a:t>
                       </a:r>
-                      <a:endParaRPr lang="en-US" sz="950" dirty="0">
+                      <a:endParaRPr lang="en-US" sz="900" dirty="0">
                         <a:latin typeface="Calibri" charset="0"/>
                         <a:ea typeface="Calibri" charset="0"/>
                         <a:cs typeface="Calibri" charset="0"/>
@@ -1881,7 +2019,7 @@
                         <a:buNone/>
                       </a:pPr>
                       <a:r>
-                        <a:rPr lang="en-US" sz="950" b="1" dirty="0">
+                        <a:rPr lang="en-US" sz="900" b="1" dirty="0">
                           <a:solidFill>
                             <a:srgbClr val="2B2350"/>
                           </a:solidFill>
@@ -1891,7 +2029,7 @@
                         </a:rPr>
                         <a:t>Manual steps on the recruitment path</a:t>
                       </a:r>
-                      <a:endParaRPr lang="en-US" sz="950" dirty="0">
+                      <a:endParaRPr lang="en-US" sz="900" dirty="0">
                         <a:latin typeface="Calibri" charset="0"/>
                         <a:ea typeface="Calibri" charset="0"/>
                         <a:cs typeface="Calibri" charset="0"/>
@@ -1949,7 +2087,7 @@
                         <a:buNone/>
                       </a:pPr>
                       <a:r>
-                        <a:rPr lang="en-US" sz="950" dirty="0">
+                        <a:rPr lang="en-US" sz="900" dirty="0">
                           <a:solidFill>
                             <a:srgbClr val="1F2233"/>
                           </a:solidFill>
@@ -1959,7 +2097,7 @@
                         </a:rPr>
                         <a:t>7 manual hand-offs, including Enquirer → UnitE, plus 6 manual input points</a:t>
                       </a:r>
-                      <a:endParaRPr lang="en-US" sz="950" dirty="0">
+                      <a:endParaRPr lang="en-US" sz="900" dirty="0">
                         <a:latin typeface="Calibri" charset="0"/>
                         <a:ea typeface="Calibri" charset="0"/>
                         <a:cs typeface="Calibri" charset="0"/>
@@ -2017,7 +2155,7 @@
                         <a:buNone/>
                       </a:pPr>
                       <a:r>
-                        <a:rPr lang="en-US" sz="950" dirty="0">
+                        <a:rPr lang="en-US" sz="900" i="1" dirty="0">
                           <a:solidFill>
                             <a:srgbClr val="1F2233"/>
                           </a:solidFill>
@@ -2025,9 +2163,77 @@
                           <a:ea typeface="Calibri" pitchFamily="34" charset="-122"/>
                           <a:cs typeface="Calibri" pitchFamily="34" charset="-120"/>
                         </a:rPr>
+                        <a:t>No automated link was built between the systems, so re-keying became the routine workaround</a:t>
+                      </a:r>
+                      <a:endParaRPr lang="en-US" sz="900" dirty="0">
+                        <a:latin typeface="Calibri" charset="0"/>
+                        <a:ea typeface="Calibri" charset="0"/>
+                        <a:cs typeface="Calibri" charset="0"/>
+                      </a:endParaRPr>
+                    </a:p>
+                  </a:txBody>
+                  <a:tcPr marL="54864" marR="54864" marT="27432" marB="27432" anchor="ctr">
+                    <a:lnL w="6350" cap="flat" cmpd="sng" algn="ctr">
+                      <a:solidFill>
+                        <a:srgbClr val="D9D4E3"/>
+                      </a:solidFill>
+                      <a:prstDash val="solid"/>
+                      <a:round/>
+                      <a:headEnd type="none" w="med" len="med"/>
+                      <a:tailEnd type="none" w="med" len="med"/>
+                    </a:lnL>
+                    <a:lnR w="6350" cap="flat" cmpd="sng" algn="ctr">
+                      <a:solidFill>
+                        <a:srgbClr val="D9D4E3"/>
+                      </a:solidFill>
+                      <a:prstDash val="solid"/>
+                      <a:round/>
+                      <a:headEnd type="none" w="med" len="med"/>
+                      <a:tailEnd type="none" w="med" len="med"/>
+                    </a:lnR>
+                    <a:lnT w="6350" cap="flat" cmpd="sng" algn="ctr">
+                      <a:solidFill>
+                        <a:srgbClr val="D9D4E3"/>
+                      </a:solidFill>
+                      <a:prstDash val="solid"/>
+                      <a:round/>
+                      <a:headEnd type="none" w="med" len="med"/>
+                      <a:tailEnd type="none" w="med" len="med"/>
+                    </a:lnT>
+                    <a:lnB w="6350" cap="flat" cmpd="sng" algn="ctr">
+                      <a:solidFill>
+                        <a:srgbClr val="D9D4E3"/>
+                      </a:solidFill>
+                      <a:prstDash val="solid"/>
+                      <a:round/>
+                      <a:headEnd type="none" w="med" len="med"/>
+                      <a:tailEnd type="none" w="med" len="med"/>
+                    </a:lnB>
+                    <a:solidFill>
+                      <a:srgbClr val="F7F5FA"/>
+                    </a:solidFill>
+                  </a:tcPr>
+                </a:tc>
+                <a:tc>
+                  <a:txBody>
+                    <a:bodyPr/>
+                    <a:lstStyle/>
+                    <a:p>
+                      <a:pPr indent="0" marL="0">
+                        <a:buNone/>
+                      </a:pPr>
+                      <a:r>
+                        <a:rPr lang="en-US" sz="900" dirty="0">
+                          <a:solidFill>
+                            <a:srgbClr val="1F2233"/>
+                          </a:solidFill>
+                          <a:latin typeface="Calibri" pitchFamily="34" charset="0"/>
+                          <a:ea typeface="Calibri" pitchFamily="34" charset="-122"/>
+                          <a:cs typeface="Calibri" pitchFamily="34" charset="-120"/>
+                        </a:rPr>
                         <a:t>Delays, typing errors and missing records between applications and enrolments</a:t>
                       </a:r>
-                      <a:endParaRPr lang="en-US" sz="950" dirty="0">
+                      <a:endParaRPr lang="en-US" sz="900" dirty="0">
                         <a:latin typeface="Calibri" charset="0"/>
                         <a:ea typeface="Calibri" charset="0"/>
                         <a:cs typeface="Calibri" charset="0"/>
@@ -2085,7 +2291,7 @@
                         <a:buNone/>
                       </a:pPr>
                       <a:r>
-                        <a:rPr lang="en-US" sz="950" dirty="0">
+                        <a:rPr lang="en-US" sz="900" dirty="0">
                           <a:solidFill>
                             <a:srgbClr val="1F2233"/>
                           </a:solidFill>
@@ -2095,7 +2301,7 @@
                         </a:rPr>
                         <a:t>Monthly count check: Enquirer vs UnitE vs RA5, starting with YCCJ/AL</a:t>
                       </a:r>
-                      <a:endParaRPr lang="en-US" sz="950" dirty="0">
+                      <a:endParaRPr lang="en-US" sz="900" dirty="0">
                         <a:latin typeface="Calibri" charset="0"/>
                         <a:ea typeface="Calibri" charset="0"/>
                         <a:cs typeface="Calibri" charset="0"/>
@@ -2153,7 +2359,7 @@
                         <a:buNone/>
                       </a:pPr>
                       <a:r>
-                        <a:rPr lang="en-US" sz="950" b="1" dirty="0">
+                        <a:rPr lang="en-US" sz="900" b="1" dirty="0">
                           <a:solidFill>
                             <a:srgbClr val="8C1A5C"/>
                           </a:solidFill>
@@ -2163,7 +2369,7 @@
                         </a:rPr>
                         <a:t>High</a:t>
                       </a:r>
-                      <a:endParaRPr lang="en-US" sz="950" dirty="0">
+                      <a:endParaRPr lang="en-US" sz="900" dirty="0">
                         <a:latin typeface="Calibri" charset="0"/>
                         <a:ea typeface="Calibri" charset="0"/>
                         <a:cs typeface="Calibri" charset="0"/>
@@ -2223,7 +2429,7 @@
                         <a:buNone/>
                       </a:pPr>
                       <a:r>
-                        <a:rPr lang="en-US" sz="950" b="1" dirty="0">
+                        <a:rPr lang="en-US" sz="900" b="1" dirty="0">
                           <a:solidFill>
                             <a:srgbClr val="A3206E"/>
                           </a:solidFill>
@@ -2233,7 +2439,7 @@
                         </a:rPr>
                         <a:t>3</a:t>
                       </a:r>
-                      <a:endParaRPr lang="en-US" sz="950" dirty="0">
+                      <a:endParaRPr lang="en-US" sz="900" dirty="0">
                         <a:latin typeface="Calibri" charset="0"/>
                         <a:ea typeface="Calibri" charset="0"/>
                         <a:cs typeface="Calibri" charset="0"/>
@@ -2291,7 +2497,7 @@
                         <a:buNone/>
                       </a:pPr>
                       <a:r>
-                        <a:rPr lang="en-US" sz="950" b="1" dirty="0">
+                        <a:rPr lang="en-US" sz="900" b="1" dirty="0">
                           <a:solidFill>
                             <a:srgbClr val="2B2350"/>
                           </a:solidFill>
@@ -2301,7 +2507,7 @@
                         </a:rPr>
                         <a:t>Two-way loops around UnitE</a:t>
                       </a:r>
-                      <a:endParaRPr lang="en-US" sz="950" dirty="0">
+                      <a:endParaRPr lang="en-US" sz="900" dirty="0">
                         <a:latin typeface="Calibri" charset="0"/>
                         <a:ea typeface="Calibri" charset="0"/>
                         <a:cs typeface="Calibri" charset="0"/>
@@ -2359,7 +2565,7 @@
                         <a:buNone/>
                       </a:pPr>
                       <a:r>
-                        <a:rPr lang="en-US" sz="950" dirty="0">
+                        <a:rPr lang="en-US" sz="900" dirty="0">
                           <a:solidFill>
                             <a:srgbClr val="1F2233"/>
                           </a:solidFill>
@@ -2369,7 +2575,7 @@
                         </a:rPr>
                         <a:t>UnitE sends data out automatically; Enquirer, Bursary, Student Portal and FVC Portal send it back by hand</a:t>
                       </a:r>
-                      <a:endParaRPr lang="en-US" sz="950" dirty="0">
+                      <a:endParaRPr lang="en-US" sz="900" dirty="0">
                         <a:latin typeface="Calibri" charset="0"/>
                         <a:ea typeface="Calibri" charset="0"/>
                         <a:cs typeface="Calibri" charset="0"/>
@@ -2427,7 +2633,7 @@
                         <a:buNone/>
                       </a:pPr>
                       <a:r>
-                        <a:rPr lang="en-US" sz="950" dirty="0">
+                        <a:rPr lang="en-US" sz="900" i="1" dirty="0">
                           <a:solidFill>
                             <a:srgbClr val="1F2233"/>
                           </a:solidFill>
@@ -2435,9 +2641,9 @@
                           <a:ea typeface="Calibri" pitchFamily="34" charset="-122"/>
                           <a:cs typeface="Calibri" pitchFamily="34" charset="-120"/>
                         </a:rPr>
-                        <a:t>No rule for which system wins. Power BI reads both UnitE and Enquirer</a:t>
-                      </a:r>
-                      <a:endParaRPr lang="en-US" sz="950" dirty="0">
+                        <a:t>Other systems need to correct or add data but have no write-back link to UnitE</a:t>
+                      </a:r>
+                      <a:endParaRPr lang="en-US" sz="900" dirty="0">
                         <a:latin typeface="Calibri" charset="0"/>
                         <a:ea typeface="Calibri" charset="0"/>
                         <a:cs typeface="Calibri" charset="0"/>
@@ -2495,7 +2701,7 @@
                         <a:buNone/>
                       </a:pPr>
                       <a:r>
-                        <a:rPr lang="en-US" sz="950" dirty="0">
+                        <a:rPr lang="en-US" sz="900" dirty="0">
                           <a:solidFill>
                             <a:srgbClr val="1F2233"/>
                           </a:solidFill>
@@ -2503,9 +2709,77 @@
                           <a:ea typeface="Calibri" pitchFamily="34" charset="-122"/>
                           <a:cs typeface="Calibri" pitchFamily="34" charset="-120"/>
                         </a:rPr>
+                        <a:t>No rule for which system wins; Power BI reads both UnitE and Enquirer</a:t>
+                      </a:r>
+                      <a:endParaRPr lang="en-US" sz="900" dirty="0">
+                        <a:latin typeface="Calibri" charset="0"/>
+                        <a:ea typeface="Calibri" charset="0"/>
+                        <a:cs typeface="Calibri" charset="0"/>
+                      </a:endParaRPr>
+                    </a:p>
+                  </a:txBody>
+                  <a:tcPr marL="54864" marR="54864" marT="27432" marB="27432" anchor="ctr">
+                    <a:lnL w="6350" cap="flat" cmpd="sng" algn="ctr">
+                      <a:solidFill>
+                        <a:srgbClr val="D9D4E3"/>
+                      </a:solidFill>
+                      <a:prstDash val="solid"/>
+                      <a:round/>
+                      <a:headEnd type="none" w="med" len="med"/>
+                      <a:tailEnd type="none" w="med" len="med"/>
+                    </a:lnL>
+                    <a:lnR w="6350" cap="flat" cmpd="sng" algn="ctr">
+                      <a:solidFill>
+                        <a:srgbClr val="D9D4E3"/>
+                      </a:solidFill>
+                      <a:prstDash val="solid"/>
+                      <a:round/>
+                      <a:headEnd type="none" w="med" len="med"/>
+                      <a:tailEnd type="none" w="med" len="med"/>
+                    </a:lnR>
+                    <a:lnT w="6350" cap="flat" cmpd="sng" algn="ctr">
+                      <a:solidFill>
+                        <a:srgbClr val="D9D4E3"/>
+                      </a:solidFill>
+                      <a:prstDash val="solid"/>
+                      <a:round/>
+                      <a:headEnd type="none" w="med" len="med"/>
+                      <a:tailEnd type="none" w="med" len="med"/>
+                    </a:lnT>
+                    <a:lnB w="6350" cap="flat" cmpd="sng" algn="ctr">
+                      <a:solidFill>
+                        <a:srgbClr val="D9D4E3"/>
+                      </a:solidFill>
+                      <a:prstDash val="solid"/>
+                      <a:round/>
+                      <a:headEnd type="none" w="med" len="med"/>
+                      <a:tailEnd type="none" w="med" len="med"/>
+                    </a:lnB>
+                    <a:solidFill>
+                      <a:srgbClr val="FFFFFF"/>
+                    </a:solidFill>
+                  </a:tcPr>
+                </a:tc>
+                <a:tc>
+                  <a:txBody>
+                    <a:bodyPr/>
+                    <a:lstStyle/>
+                    <a:p>
+                      <a:pPr indent="0" marL="0">
+                        <a:buNone/>
+                      </a:pPr>
+                      <a:r>
+                        <a:rPr lang="en-US" sz="900" dirty="0">
+                          <a:solidFill>
+                            <a:srgbClr val="1F2233"/>
+                          </a:solidFill>
+                          <a:latin typeface="Calibri" pitchFamily="34" charset="0"/>
+                          <a:ea typeface="Calibri" pitchFamily="34" charset="-122"/>
+                          <a:cs typeface="Calibri" pitchFamily="34" charset="-120"/>
+                        </a:rPr>
                         <a:t>Covered by the system-of-record agreement (Lesley, Kevin)</a:t>
                       </a:r>
-                      <a:endParaRPr lang="en-US" sz="950" dirty="0">
+                      <a:endParaRPr lang="en-US" sz="900" dirty="0">
                         <a:latin typeface="Calibri" charset="0"/>
                         <a:ea typeface="Calibri" charset="0"/>
                         <a:cs typeface="Calibri" charset="0"/>
@@ -2563,7 +2837,7 @@
                         <a:buNone/>
                       </a:pPr>
                       <a:r>
-                        <a:rPr lang="en-US" sz="950" b="1" dirty="0">
+                        <a:rPr lang="en-US" sz="900" b="1" dirty="0">
                           <a:solidFill>
                             <a:srgbClr val="8C1A5C"/>
                           </a:solidFill>
@@ -2573,7 +2847,7 @@
                         </a:rPr>
                         <a:t>High</a:t>
                       </a:r>
-                      <a:endParaRPr lang="en-US" sz="950" dirty="0">
+                      <a:endParaRPr lang="en-US" sz="900" dirty="0">
                         <a:latin typeface="Calibri" charset="0"/>
                         <a:ea typeface="Calibri" charset="0"/>
                         <a:cs typeface="Calibri" charset="0"/>
@@ -2633,7 +2907,7 @@
                         <a:buNone/>
                       </a:pPr>
                       <a:r>
-                        <a:rPr lang="en-US" sz="950" b="1" dirty="0">
+                        <a:rPr lang="en-US" sz="900" b="1" dirty="0">
                           <a:solidFill>
                             <a:srgbClr val="A3206E"/>
                           </a:solidFill>
@@ -2643,7 +2917,7 @@
                         </a:rPr>
                         <a:t>4</a:t>
                       </a:r>
-                      <a:endParaRPr lang="en-US" sz="950" dirty="0">
+                      <a:endParaRPr lang="en-US" sz="900" dirty="0">
                         <a:latin typeface="Calibri" charset="0"/>
                         <a:ea typeface="Calibri" charset="0"/>
                         <a:cs typeface="Calibri" charset="0"/>
@@ -2701,7 +2975,7 @@
                         <a:buNone/>
                       </a:pPr>
                       <a:r>
-                        <a:rPr lang="en-US" sz="950" b="1" dirty="0">
+                        <a:rPr lang="en-US" sz="900" b="1" dirty="0">
                           <a:solidFill>
                             <a:srgbClr val="2B2350"/>
                           </a:solidFill>
@@ -2711,7 +2985,7 @@
                         </a:rPr>
                         <a:t>Students missing from UnitE or BI</a:t>
                       </a:r>
-                      <a:endParaRPr lang="en-US" sz="950" dirty="0">
+                      <a:endParaRPr lang="en-US" sz="900" dirty="0">
                         <a:latin typeface="Calibri" charset="0"/>
                         <a:ea typeface="Calibri" charset="0"/>
                         <a:cs typeface="Calibri" charset="0"/>
@@ -2769,7 +3043,7 @@
                         <a:buNone/>
                       </a:pPr>
                       <a:r>
-                        <a:rPr lang="en-US" sz="950" dirty="0">
+                        <a:rPr lang="en-US" sz="900" dirty="0">
                           <a:solidFill>
                             <a:srgbClr val="1F2233"/>
                           </a:solidFill>
@@ -2779,7 +3053,7 @@
                         </a:rPr>
                         <a:t>Dante "not on Unit-E" and not on the connector. Onefile, JTL and Dataserve unconnected. Celcat not on the connector</a:t>
                       </a:r>
-                      <a:endParaRPr lang="en-US" sz="950" dirty="0">
+                      <a:endParaRPr lang="en-US" sz="900" dirty="0">
                         <a:latin typeface="Calibri" charset="0"/>
                         <a:ea typeface="Calibri" charset="0"/>
                         <a:cs typeface="Calibri" charset="0"/>
@@ -2837,7 +3111,7 @@
                         <a:buNone/>
                       </a:pPr>
                       <a:r>
-                        <a:rPr lang="en-US" sz="950" dirty="0">
+                        <a:rPr lang="en-US" sz="900" i="1" dirty="0">
                           <a:solidFill>
                             <a:srgbClr val="1F2233"/>
                           </a:solidFill>
@@ -2845,9 +3119,77 @@
                           <a:ea typeface="Calibri" pitchFamily="34" charset="-122"/>
                           <a:cs typeface="Calibri" pitchFamily="34" charset="-120"/>
                         </a:rPr>
+                        <a:t>Commercial and apprenticeship courses run on separate systems with their own processes; BI was built around UnitE and Enquirer</a:t>
+                      </a:r>
+                      <a:endParaRPr lang="en-US" sz="900" dirty="0">
+                        <a:latin typeface="Calibri" charset="0"/>
+                        <a:ea typeface="Calibri" charset="0"/>
+                        <a:cs typeface="Calibri" charset="0"/>
+                      </a:endParaRPr>
+                    </a:p>
+                  </a:txBody>
+                  <a:tcPr marL="54864" marR="54864" marT="27432" marB="27432" anchor="ctr">
+                    <a:lnL w="6350" cap="flat" cmpd="sng" algn="ctr">
+                      <a:solidFill>
+                        <a:srgbClr val="D9D4E3"/>
+                      </a:solidFill>
+                      <a:prstDash val="solid"/>
+                      <a:round/>
+                      <a:headEnd type="none" w="med" len="med"/>
+                      <a:tailEnd type="none" w="med" len="med"/>
+                    </a:lnL>
+                    <a:lnR w="6350" cap="flat" cmpd="sng" algn="ctr">
+                      <a:solidFill>
+                        <a:srgbClr val="D9D4E3"/>
+                      </a:solidFill>
+                      <a:prstDash val="solid"/>
+                      <a:round/>
+                      <a:headEnd type="none" w="med" len="med"/>
+                      <a:tailEnd type="none" w="med" len="med"/>
+                    </a:lnR>
+                    <a:lnT w="6350" cap="flat" cmpd="sng" algn="ctr">
+                      <a:solidFill>
+                        <a:srgbClr val="D9D4E3"/>
+                      </a:solidFill>
+                      <a:prstDash val="solid"/>
+                      <a:round/>
+                      <a:headEnd type="none" w="med" len="med"/>
+                      <a:tailEnd type="none" w="med" len="med"/>
+                    </a:lnT>
+                    <a:lnB w="6350" cap="flat" cmpd="sng" algn="ctr">
+                      <a:solidFill>
+                        <a:srgbClr val="D9D4E3"/>
+                      </a:solidFill>
+                      <a:prstDash val="solid"/>
+                      <a:round/>
+                      <a:headEnd type="none" w="med" len="med"/>
+                      <a:tailEnd type="none" w="med" len="med"/>
+                    </a:lnB>
+                    <a:solidFill>
+                      <a:srgbClr val="F7F5FA"/>
+                    </a:solidFill>
+                  </a:tcPr>
+                </a:tc>
+                <a:tc>
+                  <a:txBody>
+                    <a:bodyPr/>
+                    <a:lstStyle/>
+                    <a:p>
+                      <a:pPr indent="0" marL="0">
+                        <a:buNone/>
+                      </a:pPr>
+                      <a:r>
+                        <a:rPr lang="en-US" sz="900" dirty="0">
+                          <a:solidFill>
+                            <a:srgbClr val="1F2233"/>
+                          </a:solidFill>
+                          <a:latin typeface="Calibri" pitchFamily="34" charset="0"/>
+                          <a:ea typeface="Calibri" pitchFamily="34" charset="-122"/>
+                          <a:cs typeface="Calibri" pitchFamily="34" charset="-120"/>
+                        </a:rPr>
                         <a:t>Totals may quietly leave out commercial students and apprentices</a:t>
                       </a:r>
-                      <a:endParaRPr lang="en-US" sz="950" dirty="0">
+                      <a:endParaRPr lang="en-US" sz="900" dirty="0">
                         <a:latin typeface="Calibri" charset="0"/>
                         <a:ea typeface="Calibri" charset="0"/>
                         <a:cs typeface="Calibri" charset="0"/>
@@ -2905,7 +3247,7 @@
                         <a:buNone/>
                       </a:pPr>
                       <a:r>
-                        <a:rPr lang="en-US" sz="950" dirty="0">
+                        <a:rPr lang="en-US" sz="900" dirty="0">
                           <a:solidFill>
                             <a:srgbClr val="1F2233"/>
                           </a:solidFill>
@@ -2915,7 +3257,7 @@
                         </a:rPr>
                         <a:t>Ask Kevin which systems can join the SQL connector</a:t>
                       </a:r>
-                      <a:endParaRPr lang="en-US" sz="950" dirty="0">
+                      <a:endParaRPr lang="en-US" sz="900" dirty="0">
                         <a:latin typeface="Calibri" charset="0"/>
                         <a:ea typeface="Calibri" charset="0"/>
                         <a:cs typeface="Calibri" charset="0"/>
@@ -2973,7 +3315,7 @@
                         <a:buNone/>
                       </a:pPr>
                       <a:r>
-                        <a:rPr lang="en-US" sz="950" b="1" dirty="0">
+                        <a:rPr lang="en-US" sz="900" b="1" dirty="0">
                           <a:solidFill>
                             <a:srgbClr val="8C1A5C"/>
                           </a:solidFill>
@@ -2983,7 +3325,7 @@
                         </a:rPr>
                         <a:t>High</a:t>
                       </a:r>
-                      <a:endParaRPr lang="en-US" sz="950" dirty="0">
+                      <a:endParaRPr lang="en-US" sz="900" dirty="0">
                         <a:latin typeface="Calibri" charset="0"/>
                         <a:ea typeface="Calibri" charset="0"/>
                         <a:cs typeface="Calibri" charset="0"/>
@@ -3043,7 +3385,7 @@
                         <a:buNone/>
                       </a:pPr>
                       <a:r>
-                        <a:rPr lang="en-US" sz="950" b="1" dirty="0">
+                        <a:rPr lang="en-US" sz="900" b="1" dirty="0">
                           <a:solidFill>
                             <a:srgbClr val="A3206E"/>
                           </a:solidFill>
@@ -3053,7 +3395,7 @@
                         </a:rPr>
                         <a:t>5</a:t>
                       </a:r>
-                      <a:endParaRPr lang="en-US" sz="950" dirty="0">
+                      <a:endParaRPr lang="en-US" sz="900" dirty="0">
                         <a:latin typeface="Calibri" charset="0"/>
                         <a:ea typeface="Calibri" charset="0"/>
                         <a:cs typeface="Calibri" charset="0"/>
@@ -3111,7 +3453,7 @@
                         <a:buNone/>
                       </a:pPr>
                       <a:r>
-                        <a:rPr lang="en-US" sz="950" b="1" dirty="0">
+                        <a:rPr lang="en-US" sz="900" b="1" dirty="0">
                           <a:solidFill>
                             <a:srgbClr val="2B2350"/>
                           </a:solidFill>
@@ -3121,7 +3463,7 @@
                         </a:rPr>
                         <a:t>Feeds that bypass the connector</a:t>
                       </a:r>
-                      <a:endParaRPr lang="en-US" sz="950" dirty="0">
+                      <a:endParaRPr lang="en-US" sz="900" dirty="0">
                         <a:latin typeface="Calibri" charset="0"/>
                         <a:ea typeface="Calibri" charset="0"/>
                         <a:cs typeface="Calibri" charset="0"/>
@@ -3179,7 +3521,7 @@
                         <a:buNone/>
                       </a:pPr>
                       <a:r>
-                        <a:rPr lang="en-US" sz="950" dirty="0">
+                        <a:rPr lang="en-US" sz="900" dirty="0">
                           <a:solidFill>
                             <a:srgbClr val="1F2233"/>
                           </a:solidFill>
@@ -3189,7 +3531,7 @@
                         </a:rPr>
                         <a:t>Complaints and UNIDESK feed Power BI directly; MS Access by hand. RA5's semantic model source unconfirmed</a:t>
                       </a:r>
-                      <a:endParaRPr lang="en-US" sz="950" dirty="0">
+                      <a:endParaRPr lang="en-US" sz="900" dirty="0">
                         <a:latin typeface="Calibri" charset="0"/>
                         <a:ea typeface="Calibri" charset="0"/>
                         <a:cs typeface="Calibri" charset="0"/>
@@ -3247,7 +3589,7 @@
                         <a:buNone/>
                       </a:pPr>
                       <a:r>
-                        <a:rPr lang="en-US" sz="950" dirty="0">
+                        <a:rPr lang="en-US" sz="900" i="1" dirty="0">
                           <a:solidFill>
                             <a:srgbClr val="1F2233"/>
                           </a:solidFill>
@@ -3255,9 +3597,77 @@
                           <a:ea typeface="Calibri" pitchFamily="34" charset="-122"/>
                           <a:cs typeface="Calibri" pitchFamily="34" charset="-120"/>
                         </a:rPr>
+                        <a:t>Teams built quick reports for their own needs; no shared rule on how data must reach Power BI</a:t>
+                      </a:r>
+                      <a:endParaRPr lang="en-US" sz="900" dirty="0">
+                        <a:latin typeface="Calibri" charset="0"/>
+                        <a:ea typeface="Calibri" charset="0"/>
+                        <a:cs typeface="Calibri" charset="0"/>
+                      </a:endParaRPr>
+                    </a:p>
+                  </a:txBody>
+                  <a:tcPr marL="54864" marR="54864" marT="27432" marB="27432" anchor="ctr">
+                    <a:lnL w="6350" cap="flat" cmpd="sng" algn="ctr">
+                      <a:solidFill>
+                        <a:srgbClr val="D9D4E3"/>
+                      </a:solidFill>
+                      <a:prstDash val="solid"/>
+                      <a:round/>
+                      <a:headEnd type="none" w="med" len="med"/>
+                      <a:tailEnd type="none" w="med" len="med"/>
+                    </a:lnL>
+                    <a:lnR w="6350" cap="flat" cmpd="sng" algn="ctr">
+                      <a:solidFill>
+                        <a:srgbClr val="D9D4E3"/>
+                      </a:solidFill>
+                      <a:prstDash val="solid"/>
+                      <a:round/>
+                      <a:headEnd type="none" w="med" len="med"/>
+                      <a:tailEnd type="none" w="med" len="med"/>
+                    </a:lnR>
+                    <a:lnT w="6350" cap="flat" cmpd="sng" algn="ctr">
+                      <a:solidFill>
+                        <a:srgbClr val="D9D4E3"/>
+                      </a:solidFill>
+                      <a:prstDash val="solid"/>
+                      <a:round/>
+                      <a:headEnd type="none" w="med" len="med"/>
+                      <a:tailEnd type="none" w="med" len="med"/>
+                    </a:lnT>
+                    <a:lnB w="6350" cap="flat" cmpd="sng" algn="ctr">
+                      <a:solidFill>
+                        <a:srgbClr val="D9D4E3"/>
+                      </a:solidFill>
+                      <a:prstDash val="solid"/>
+                      <a:round/>
+                      <a:headEnd type="none" w="med" len="med"/>
+                      <a:tailEnd type="none" w="med" len="med"/>
+                    </a:lnB>
+                    <a:solidFill>
+                      <a:srgbClr val="FFFFFF"/>
+                    </a:solidFill>
+                  </a:tcPr>
+                </a:tc>
+                <a:tc>
+                  <a:txBody>
+                    <a:bodyPr/>
+                    <a:lstStyle/>
+                    <a:p>
+                      <a:pPr indent="0" marL="0">
+                        <a:buNone/>
+                      </a:pPr>
+                      <a:r>
+                        <a:rPr lang="en-US" sz="900" dirty="0">
+                          <a:solidFill>
+                            <a:srgbClr val="1F2233"/>
+                          </a:solidFill>
+                          <a:latin typeface="Calibri" pitchFamily="34" charset="0"/>
+                          <a:ea typeface="Calibri" pitchFamily="34" charset="-122"/>
+                          <a:cs typeface="Calibri" pitchFamily="34" charset="-120"/>
+                        </a:rPr>
                         <a:t>Different refresh timing and definitions; no central checks</a:t>
                       </a:r>
-                      <a:endParaRPr lang="en-US" sz="950" dirty="0">
+                      <a:endParaRPr lang="en-US" sz="900" dirty="0">
                         <a:latin typeface="Calibri" charset="0"/>
                         <a:ea typeface="Calibri" charset="0"/>
                         <a:cs typeface="Calibri" charset="0"/>
@@ -3315,7 +3725,7 @@
                         <a:buNone/>
                       </a:pPr>
                       <a:r>
-                        <a:rPr lang="en-US" sz="950" dirty="0">
+                        <a:rPr lang="en-US" sz="900" dirty="0">
                           <a:solidFill>
                             <a:srgbClr val="1F2233"/>
                           </a:solidFill>
@@ -3325,7 +3735,7 @@
                         </a:rPr>
                         <a:t>Kevin to confirm RA5's source; route feeds through the connector</a:t>
                       </a:r>
-                      <a:endParaRPr lang="en-US" sz="950" dirty="0">
+                      <a:endParaRPr lang="en-US" sz="900" dirty="0">
                         <a:latin typeface="Calibri" charset="0"/>
                         <a:ea typeface="Calibri" charset="0"/>
                         <a:cs typeface="Calibri" charset="0"/>
@@ -3383,7 +3793,7 @@
                         <a:buNone/>
                       </a:pPr>
                       <a:r>
-                        <a:rPr lang="en-US" sz="950" b="1" dirty="0">
+                        <a:rPr lang="en-US" sz="900" b="1" dirty="0">
                           <a:solidFill>
                             <a:srgbClr val="8A4B0F"/>
                           </a:solidFill>
@@ -3393,7 +3803,7 @@
                         </a:rPr>
                         <a:t>Medium</a:t>
                       </a:r>
-                      <a:endParaRPr lang="en-US" sz="950" dirty="0">
+                      <a:endParaRPr lang="en-US" sz="900" dirty="0">
                         <a:latin typeface="Calibri" charset="0"/>
                         <a:ea typeface="Calibri" charset="0"/>
                         <a:cs typeface="Calibri" charset="0"/>
@@ -3453,7 +3863,7 @@
                         <a:buNone/>
                       </a:pPr>
                       <a:r>
-                        <a:rPr lang="en-US" sz="950" b="1" dirty="0">
+                        <a:rPr lang="en-US" sz="900" b="1" dirty="0">
                           <a:solidFill>
                             <a:srgbClr val="A3206E"/>
                           </a:solidFill>
@@ -3463,7 +3873,7 @@
                         </a:rPr>
                         <a:t>6</a:t>
                       </a:r>
-                      <a:endParaRPr lang="en-US" sz="950" dirty="0">
+                      <a:endParaRPr lang="en-US" sz="900" dirty="0">
                         <a:latin typeface="Calibri" charset="0"/>
                         <a:ea typeface="Calibri" charset="0"/>
                         <a:cs typeface="Calibri" charset="0"/>
@@ -3521,7 +3931,7 @@
                         <a:buNone/>
                       </a:pPr>
                       <a:r>
-                        <a:rPr lang="en-US" sz="950" b="1" dirty="0">
+                        <a:rPr lang="en-US" sz="900" b="1" dirty="0">
                           <a:solidFill>
                             <a:srgbClr val="2B2350"/>
                           </a:solidFill>
@@ -3531,7 +3941,7 @@
                         </a:rPr>
                         <a:t>Incomplete or unverified bursary feeds</a:t>
                       </a:r>
-                      <a:endParaRPr lang="en-US" sz="950" dirty="0">
+                      <a:endParaRPr lang="en-US" sz="900" dirty="0">
                         <a:latin typeface="Calibri" charset="0"/>
                         <a:ea typeface="Calibri" charset="0"/>
                         <a:cs typeface="Calibri" charset="0"/>
@@ -3589,7 +3999,7 @@
                         <a:buNone/>
                       </a:pPr>
                       <a:r>
-                        <a:rPr lang="en-US" sz="950" dirty="0">
+                        <a:rPr lang="en-US" sz="900" dirty="0">
                           <a:solidFill>
                             <a:srgbClr val="1F2233"/>
                           </a:solidFill>
@@ -3599,7 +4009,7 @@
                         </a:rPr>
                         <a:t>"Can see only ready to outstanding award, not process evidence"; status marked "Finance need to check"</a:t>
                       </a:r>
-                      <a:endParaRPr lang="en-US" sz="950" dirty="0">
+                      <a:endParaRPr lang="en-US" sz="900" dirty="0">
                         <a:latin typeface="Calibri" charset="0"/>
                         <a:ea typeface="Calibri" charset="0"/>
                         <a:cs typeface="Calibri" charset="0"/>
@@ -3657,7 +4067,7 @@
                         <a:buNone/>
                       </a:pPr>
                       <a:r>
-                        <a:rPr lang="en-US" sz="950" dirty="0">
+                        <a:rPr lang="en-US" sz="900" i="1" dirty="0">
                           <a:solidFill>
                             <a:srgbClr val="1F2233"/>
                           </a:solidFill>
@@ -3665,9 +4075,77 @@
                           <a:ea typeface="Calibri" pitchFamily="34" charset="-122"/>
                           <a:cs typeface="Calibri" pitchFamily="34" charset="-120"/>
                         </a:rPr>
+                        <a:t>Evidence checks happen outside the Bursary system, and Finance confirms status separately</a:t>
+                      </a:r>
+                      <a:endParaRPr lang="en-US" sz="900" dirty="0">
+                        <a:latin typeface="Calibri" charset="0"/>
+                        <a:ea typeface="Calibri" charset="0"/>
+                        <a:cs typeface="Calibri" charset="0"/>
+                      </a:endParaRPr>
+                    </a:p>
+                  </a:txBody>
+                  <a:tcPr marL="54864" marR="54864" marT="27432" marB="27432" anchor="ctr">
+                    <a:lnL w="6350" cap="flat" cmpd="sng" algn="ctr">
+                      <a:solidFill>
+                        <a:srgbClr val="D9D4E3"/>
+                      </a:solidFill>
+                      <a:prstDash val="solid"/>
+                      <a:round/>
+                      <a:headEnd type="none" w="med" len="med"/>
+                      <a:tailEnd type="none" w="med" len="med"/>
+                    </a:lnL>
+                    <a:lnR w="6350" cap="flat" cmpd="sng" algn="ctr">
+                      <a:solidFill>
+                        <a:srgbClr val="D9D4E3"/>
+                      </a:solidFill>
+                      <a:prstDash val="solid"/>
+                      <a:round/>
+                      <a:headEnd type="none" w="med" len="med"/>
+                      <a:tailEnd type="none" w="med" len="med"/>
+                    </a:lnR>
+                    <a:lnT w="6350" cap="flat" cmpd="sng" algn="ctr">
+                      <a:solidFill>
+                        <a:srgbClr val="D9D4E3"/>
+                      </a:solidFill>
+                      <a:prstDash val="solid"/>
+                      <a:round/>
+                      <a:headEnd type="none" w="med" len="med"/>
+                      <a:tailEnd type="none" w="med" len="med"/>
+                    </a:lnT>
+                    <a:lnB w="6350" cap="flat" cmpd="sng" algn="ctr">
+                      <a:solidFill>
+                        <a:srgbClr val="D9D4E3"/>
+                      </a:solidFill>
+                      <a:prstDash val="solid"/>
+                      <a:round/>
+                      <a:headEnd type="none" w="med" len="med"/>
+                      <a:tailEnd type="none" w="med" len="med"/>
+                    </a:lnB>
+                    <a:solidFill>
+                      <a:srgbClr val="F7F5FA"/>
+                    </a:solidFill>
+                  </a:tcPr>
+                </a:tc>
+                <a:tc>
+                  <a:txBody>
+                    <a:bodyPr/>
+                    <a:lstStyle/>
+                    <a:p>
+                      <a:pPr indent="0" marL="0">
+                        <a:buNone/>
+                      </a:pPr>
+                      <a:r>
+                        <a:rPr lang="en-US" sz="900" dirty="0">
+                          <a:solidFill>
+                            <a:srgbClr val="1F2233"/>
+                          </a:solidFill>
+                          <a:latin typeface="Calibri" pitchFamily="34" charset="0"/>
+                          <a:ea typeface="Calibri" pitchFamily="34" charset="-122"/>
+                          <a:cs typeface="Calibri" pitchFamily="34" charset="-120"/>
+                        </a:rPr>
                         <a:t>Bursary pipeline in Power BI is only partly visible</a:t>
                       </a:r>
-                      <a:endParaRPr lang="en-US" sz="950" dirty="0">
+                      <a:endParaRPr lang="en-US" sz="900" dirty="0">
                         <a:latin typeface="Calibri" charset="0"/>
                         <a:ea typeface="Calibri" charset="0"/>
                         <a:cs typeface="Calibri" charset="0"/>
@@ -3725,7 +4203,7 @@
                         <a:buNone/>
                       </a:pPr>
                       <a:r>
-                        <a:rPr lang="en-US" sz="950" dirty="0">
+                        <a:rPr lang="en-US" sz="900" dirty="0">
                           <a:solidFill>
                             <a:srgbClr val="1F2233"/>
                           </a:solidFill>
@@ -3735,7 +4213,7 @@
                         </a:rPr>
                         <a:t>Confirm with Finance which Bursary data is complete</a:t>
                       </a:r>
-                      <a:endParaRPr lang="en-US" sz="950" dirty="0">
+                      <a:endParaRPr lang="en-US" sz="900" dirty="0">
                         <a:latin typeface="Calibri" charset="0"/>
                         <a:ea typeface="Calibri" charset="0"/>
                         <a:cs typeface="Calibri" charset="0"/>
@@ -3793,7 +4271,7 @@
                         <a:buNone/>
                       </a:pPr>
                       <a:r>
-                        <a:rPr lang="en-US" sz="950" b="1" dirty="0">
+                        <a:rPr lang="en-US" sz="900" b="1" dirty="0">
                           <a:solidFill>
                             <a:srgbClr val="8A4B0F"/>
                           </a:solidFill>
@@ -3803,7 +4281,7 @@
                         </a:rPr>
                         <a:t>Medium</a:t>
                       </a:r>
-                      <a:endParaRPr lang="en-US" sz="950" dirty="0">
+                      <a:endParaRPr lang="en-US" sz="900" dirty="0">
                         <a:latin typeface="Calibri" charset="0"/>
                         <a:ea typeface="Calibri" charset="0"/>
                         <a:cs typeface="Calibri" charset="0"/>
@@ -3863,7 +4341,7 @@
                         <a:buNone/>
                       </a:pPr>
                       <a:r>
-                        <a:rPr lang="en-US" sz="950" b="1" dirty="0">
+                        <a:rPr lang="en-US" sz="900" b="1" dirty="0">
                           <a:solidFill>
                             <a:srgbClr val="A3206E"/>
                           </a:solidFill>
@@ -3873,7 +4351,7 @@
                         </a:rPr>
                         <a:t>7</a:t>
                       </a:r>
-                      <a:endParaRPr lang="en-US" sz="950" dirty="0">
+                      <a:endParaRPr lang="en-US" sz="900" dirty="0">
                         <a:latin typeface="Calibri" charset="0"/>
                         <a:ea typeface="Calibri" charset="0"/>
                         <a:cs typeface="Calibri" charset="0"/>
@@ -3931,7 +4409,7 @@
                         <a:buNone/>
                       </a:pPr>
                       <a:r>
-                        <a:rPr lang="en-US" sz="950" b="1" dirty="0">
+                        <a:rPr lang="en-US" sz="900" b="1" dirty="0">
                           <a:solidFill>
                             <a:srgbClr val="2B2350"/>
                           </a:solidFill>
@@ -3941,7 +4419,7 @@
                         </a:rPr>
                         <a:t>No status history</a:t>
                       </a:r>
-                      <a:endParaRPr lang="en-US" sz="950" dirty="0">
+                      <a:endParaRPr lang="en-US" sz="900" dirty="0">
                         <a:latin typeface="Calibri" charset="0"/>
                         <a:ea typeface="Calibri" charset="0"/>
                         <a:cs typeface="Calibri" charset="0"/>
@@ -3999,7 +4477,7 @@
                         <a:buNone/>
                       </a:pPr>
                       <a:r>
-                        <a:rPr lang="en-US" sz="950" dirty="0">
+                        <a:rPr lang="en-US" sz="900" dirty="0">
                           <a:solidFill>
                             <a:srgbClr val="1F2233"/>
                           </a:solidFill>
@@ -4009,7 +4487,7 @@
                         </a:rPr>
                         <a:t>Enquirer keeps only each application's current status</a:t>
                       </a:r>
-                      <a:endParaRPr lang="en-US" sz="950" dirty="0">
+                      <a:endParaRPr lang="en-US" sz="900" dirty="0">
                         <a:latin typeface="Calibri" charset="0"/>
                         <a:ea typeface="Calibri" charset="0"/>
                         <a:cs typeface="Calibri" charset="0"/>
@@ -4067,7 +4545,7 @@
                         <a:buNone/>
                       </a:pPr>
                       <a:r>
-                        <a:rPr lang="en-US" sz="950" dirty="0">
+                        <a:rPr lang="en-US" sz="900" i="1" dirty="0">
                           <a:solidFill>
                             <a:srgbClr val="1F2233"/>
                           </a:solidFill>
@@ -4075,9 +4553,77 @@
                           <a:ea typeface="Calibri" pitchFamily="34" charset="-122"/>
                           <a:cs typeface="Calibri" pitchFamily="34" charset="-120"/>
                         </a:rPr>
+                        <a:t>Each status change overwrites the last one; no snapshot or audit table was set up</a:t>
+                      </a:r>
+                      <a:endParaRPr lang="en-US" sz="900" dirty="0">
+                        <a:latin typeface="Calibri" charset="0"/>
+                        <a:ea typeface="Calibri" charset="0"/>
+                        <a:cs typeface="Calibri" charset="0"/>
+                      </a:endParaRPr>
+                    </a:p>
+                  </a:txBody>
+                  <a:tcPr marL="54864" marR="54864" marT="27432" marB="27432" anchor="ctr">
+                    <a:lnL w="6350" cap="flat" cmpd="sng" algn="ctr">
+                      <a:solidFill>
+                        <a:srgbClr val="D9D4E3"/>
+                      </a:solidFill>
+                      <a:prstDash val="solid"/>
+                      <a:round/>
+                      <a:headEnd type="none" w="med" len="med"/>
+                      <a:tailEnd type="none" w="med" len="med"/>
+                    </a:lnL>
+                    <a:lnR w="6350" cap="flat" cmpd="sng" algn="ctr">
+                      <a:solidFill>
+                        <a:srgbClr val="D9D4E3"/>
+                      </a:solidFill>
+                      <a:prstDash val="solid"/>
+                      <a:round/>
+                      <a:headEnd type="none" w="med" len="med"/>
+                      <a:tailEnd type="none" w="med" len="med"/>
+                    </a:lnR>
+                    <a:lnT w="6350" cap="flat" cmpd="sng" algn="ctr">
+                      <a:solidFill>
+                        <a:srgbClr val="D9D4E3"/>
+                      </a:solidFill>
+                      <a:prstDash val="solid"/>
+                      <a:round/>
+                      <a:headEnd type="none" w="med" len="med"/>
+                      <a:tailEnd type="none" w="med" len="med"/>
+                    </a:lnT>
+                    <a:lnB w="6350" cap="flat" cmpd="sng" algn="ctr">
+                      <a:solidFill>
+                        <a:srgbClr val="D9D4E3"/>
+                      </a:solidFill>
+                      <a:prstDash val="solid"/>
+                      <a:round/>
+                      <a:headEnd type="none" w="med" len="med"/>
+                      <a:tailEnd type="none" w="med" len="med"/>
+                    </a:lnB>
+                    <a:solidFill>
+                      <a:srgbClr val="FFFFFF"/>
+                    </a:solidFill>
+                  </a:tcPr>
+                </a:tc>
+                <a:tc>
+                  <a:txBody>
+                    <a:bodyPr/>
+                    <a:lstStyle/>
+                    <a:p>
+                      <a:pPr indent="0" marL="0">
+                        <a:buNone/>
+                      </a:pPr>
+                      <a:r>
+                        <a:rPr lang="en-US" sz="900" dirty="0">
+                          <a:solidFill>
+                            <a:srgbClr val="1F2233"/>
+                          </a:solidFill>
+                          <a:latin typeface="Calibri" pitchFamily="34" charset="0"/>
+                          <a:ea typeface="Calibri" pitchFamily="34" charset="-122"/>
+                          <a:cs typeface="Calibri" pitchFamily="34" charset="-120"/>
+                        </a:rPr>
                         <a:t>Past offer counts cannot be rebuilt; 3-year trends understate offers</a:t>
                       </a:r>
-                      <a:endParaRPr lang="en-US" sz="950" dirty="0">
+                      <a:endParaRPr lang="en-US" sz="900" dirty="0">
                         <a:latin typeface="Calibri" charset="0"/>
                         <a:ea typeface="Calibri" charset="0"/>
                         <a:cs typeface="Calibri" charset="0"/>
@@ -4135,7 +4681,7 @@
                         <a:buNone/>
                       </a:pPr>
                       <a:r>
-                        <a:rPr lang="en-US" sz="950" dirty="0">
+                        <a:rPr lang="en-US" sz="900" dirty="0">
                           <a:solidFill>
                             <a:srgbClr val="1F2233"/>
                           </a:solidFill>
@@ -4145,7 +4691,7 @@
                         </a:rPr>
                         <a:t>Start weekly status snapshots now (Lesley)</a:t>
                       </a:r>
-                      <a:endParaRPr lang="en-US" sz="950" dirty="0">
+                      <a:endParaRPr lang="en-US" sz="900" dirty="0">
                         <a:latin typeface="Calibri" charset="0"/>
                         <a:ea typeface="Calibri" charset="0"/>
                         <a:cs typeface="Calibri" charset="0"/>
@@ -4203,7 +4749,7 @@
                         <a:buNone/>
                       </a:pPr>
                       <a:r>
-                        <a:rPr lang="en-US" sz="950" b="1" dirty="0">
+                        <a:rPr lang="en-US" sz="900" b="1" dirty="0">
                           <a:solidFill>
                             <a:srgbClr val="8A4B0F"/>
                           </a:solidFill>
@@ -4213,7 +4759,7 @@
                         </a:rPr>
                         <a:t>Medium</a:t>
                       </a:r>
-                      <a:endParaRPr lang="en-US" sz="950" dirty="0">
+                      <a:endParaRPr lang="en-US" sz="900" dirty="0">
                         <a:latin typeface="Calibri" charset="0"/>
                         <a:ea typeface="Calibri" charset="0"/>
                         <a:cs typeface="Calibri" charset="0"/>
@@ -4273,7 +4819,7 @@
                         <a:buNone/>
                       </a:pPr>
                       <a:r>
-                        <a:rPr lang="en-US" sz="950" b="1" dirty="0">
+                        <a:rPr lang="en-US" sz="900" b="1" dirty="0">
                           <a:solidFill>
                             <a:srgbClr val="A3206E"/>
                           </a:solidFill>
@@ -4283,7 +4829,7 @@
                         </a:rPr>
                         <a:t>8</a:t>
                       </a:r>
-                      <a:endParaRPr lang="en-US" sz="950" dirty="0">
+                      <a:endParaRPr lang="en-US" sz="900" dirty="0">
                         <a:latin typeface="Calibri" charset="0"/>
                         <a:ea typeface="Calibri" charset="0"/>
                         <a:cs typeface="Calibri" charset="0"/>
@@ -4341,7 +4887,7 @@
                         <a:buNone/>
                       </a:pPr>
                       <a:r>
-                        <a:rPr lang="en-US" sz="950" b="1" dirty="0">
+                        <a:rPr lang="en-US" sz="900" b="1" dirty="0">
                           <a:solidFill>
                             <a:srgbClr val="2B2350"/>
                           </a:solidFill>
@@ -4351,7 +4897,7 @@
                         </a:rPr>
                         <a:t>Student systems outside the mapped flows</a:t>
                       </a:r>
-                      <a:endParaRPr lang="en-US" sz="950" dirty="0">
+                      <a:endParaRPr lang="en-US" sz="900" dirty="0">
                         <a:latin typeface="Calibri" charset="0"/>
                         <a:ea typeface="Calibri" charset="0"/>
                         <a:cs typeface="Calibri" charset="0"/>
@@ -4409,7 +4955,7 @@
                         <a:buNone/>
                       </a:pPr>
                       <a:r>
-                        <a:rPr lang="en-US" sz="950" dirty="0">
+                        <a:rPr lang="en-US" sz="900" dirty="0">
                           <a:solidFill>
                             <a:srgbClr val="1F2233"/>
                           </a:solidFill>
@@ -4417,9 +4963,9 @@
                           <a:ea typeface="Calibri" pitchFamily="34" charset="-122"/>
                           <a:cs typeface="Calibri" pitchFamily="34" charset="-120"/>
                         </a:rPr>
-                        <a:t>7 systems in the "Don't know" group, including Theorise and CaseNotes; open "Check with" notes; bank details sent to Finance by hand</a:t>
-                      </a:r>
-                      <a:endParaRPr lang="en-US" sz="950" dirty="0">
+                        <a:t>7 systems in the "Don't know" group, incl. Theorise and CaseNotes; open "Check with" notes; bank details sent to Finance by hand</a:t>
+                      </a:r>
+                      <a:endParaRPr lang="en-US" sz="900" dirty="0">
                         <a:latin typeface="Calibri" charset="0"/>
                         <a:ea typeface="Calibri" charset="0"/>
                         <a:cs typeface="Calibri" charset="0"/>
@@ -4477,7 +5023,7 @@
                         <a:buNone/>
                       </a:pPr>
                       <a:r>
-                        <a:rPr lang="en-US" sz="950" dirty="0">
+                        <a:rPr lang="en-US" sz="900" i="1" dirty="0">
                           <a:solidFill>
                             <a:srgbClr val="1F2233"/>
                           </a:solidFill>
@@ -4485,9 +5031,77 @@
                           <a:ea typeface="Calibri" pitchFamily="34" charset="-122"/>
                           <a:cs typeface="Calibri" pitchFamily="34" charset="-120"/>
                         </a:rPr>
+                        <a:t>Systems bought by individual teams without a central register; some owners have left</a:t>
+                      </a:r>
+                      <a:endParaRPr lang="en-US" sz="900" dirty="0">
+                        <a:latin typeface="Calibri" charset="0"/>
+                        <a:ea typeface="Calibri" charset="0"/>
+                        <a:cs typeface="Calibri" charset="0"/>
+                      </a:endParaRPr>
+                    </a:p>
+                  </a:txBody>
+                  <a:tcPr marL="54864" marR="54864" marT="27432" marB="27432" anchor="ctr">
+                    <a:lnL w="6350" cap="flat" cmpd="sng" algn="ctr">
+                      <a:solidFill>
+                        <a:srgbClr val="D9D4E3"/>
+                      </a:solidFill>
+                      <a:prstDash val="solid"/>
+                      <a:round/>
+                      <a:headEnd type="none" w="med" len="med"/>
+                      <a:tailEnd type="none" w="med" len="med"/>
+                    </a:lnL>
+                    <a:lnR w="6350" cap="flat" cmpd="sng" algn="ctr">
+                      <a:solidFill>
+                        <a:srgbClr val="D9D4E3"/>
+                      </a:solidFill>
+                      <a:prstDash val="solid"/>
+                      <a:round/>
+                      <a:headEnd type="none" w="med" len="med"/>
+                      <a:tailEnd type="none" w="med" len="med"/>
+                    </a:lnR>
+                    <a:lnT w="6350" cap="flat" cmpd="sng" algn="ctr">
+                      <a:solidFill>
+                        <a:srgbClr val="D9D4E3"/>
+                      </a:solidFill>
+                      <a:prstDash val="solid"/>
+                      <a:round/>
+                      <a:headEnd type="none" w="med" len="med"/>
+                      <a:tailEnd type="none" w="med" len="med"/>
+                    </a:lnT>
+                    <a:lnB w="6350" cap="flat" cmpd="sng" algn="ctr">
+                      <a:solidFill>
+                        <a:srgbClr val="D9D4E3"/>
+                      </a:solidFill>
+                      <a:prstDash val="solid"/>
+                      <a:round/>
+                      <a:headEnd type="none" w="med" len="med"/>
+                      <a:tailEnd type="none" w="med" len="med"/>
+                    </a:lnB>
+                    <a:solidFill>
+                      <a:srgbClr val="F7F5FA"/>
+                    </a:solidFill>
+                  </a:tcPr>
+                </a:tc>
+                <a:tc>
+                  <a:txBody>
+                    <a:bodyPr/>
+                    <a:lstStyle/>
+                    <a:p>
+                      <a:pPr indent="0" marL="0">
+                        <a:buNone/>
+                      </a:pPr>
+                      <a:r>
+                        <a:rPr lang="en-US" sz="900" dirty="0">
+                          <a:solidFill>
+                            <a:srgbClr val="1F2233"/>
+                          </a:solidFill>
+                          <a:latin typeface="Calibri" pitchFamily="34" charset="0"/>
+                          <a:ea typeface="Calibri" pitchFamily="34" charset="-122"/>
+                          <a:cs typeface="Calibri" pitchFamily="34" charset="-120"/>
+                        </a:rPr>
                         <a:t>ASN picture may be incomplete; sensitive data sits outside the managed flow</a:t>
                       </a:r>
-                      <a:endParaRPr lang="en-US" sz="950" dirty="0">
+                      <a:endParaRPr lang="en-US" sz="900" dirty="0">
                         <a:latin typeface="Calibri" charset="0"/>
                         <a:ea typeface="Calibri" charset="0"/>
                         <a:cs typeface="Calibri" charset="0"/>
@@ -4545,7 +5159,7 @@
                         <a:buNone/>
                       </a:pPr>
                       <a:r>
-                        <a:rPr lang="en-US" sz="950" dirty="0">
+                        <a:rPr lang="en-US" sz="900" dirty="0">
                           <a:solidFill>
                             <a:srgbClr val="1F2233"/>
                           </a:solidFill>
@@ -4555,7 +5169,7 @@
                         </a:rPr>
                         <a:t>Close open notes, Theorise and CaseNotes first</a:t>
                       </a:r>
-                      <a:endParaRPr lang="en-US" sz="950" dirty="0">
+                      <a:endParaRPr lang="en-US" sz="900" dirty="0">
                         <a:latin typeface="Calibri" charset="0"/>
                         <a:ea typeface="Calibri" charset="0"/>
                         <a:cs typeface="Calibri" charset="0"/>
@@ -4613,7 +5227,7 @@
                         <a:buNone/>
                       </a:pPr>
                       <a:r>
-                        <a:rPr lang="en-US" sz="950" b="1" dirty="0">
+                        <a:rPr lang="en-US" sz="900" b="1" dirty="0">
                           <a:solidFill>
                             <a:srgbClr val="8A4B0F"/>
                           </a:solidFill>
@@ -4623,7 +5237,7 @@
                         </a:rPr>
                         <a:t>Medium</a:t>
                       </a:r>
-                      <a:endParaRPr lang="en-US" sz="950" dirty="0">
+                      <a:endParaRPr lang="en-US" sz="900" dirty="0">
                         <a:latin typeface="Calibri" charset="0"/>
                         <a:ea typeface="Calibri" charset="0"/>
                         <a:cs typeface="Calibri" charset="0"/>
@@ -4707,7 +5321,7 @@
                   <a:srgbClr val="6B6F80"/>
                 </a:solidFill>
               </a:rPr>
-              <a:t>Source: System Architecture working file (Lucid), checked 6 Oct 2026. Line labels were matched to lines by position on the page; confirm any that look wrong.</a:t>
+              <a:t>Source: System Architecture working file (Lucid), checked 6 Oct 2026. Causes are likely explanations to confirm with system owners. Line labels were matched to lines by position on the page.</a:t>
             </a:r>
             <a:endParaRPr lang="en-US" sz="900" dirty="0"/>
           </a:p>

--- a/data-architecture/Data_Quality_Issues_Log.pptx
+++ b/data-architecture/Data_Quality_Issues_Log.pptx
@@ -502,14 +502,13 @@
           <a:p>
             <a:r>
               <a:rPr lang="en-US" dirty="0"/>
-              <a:t>The four high-priority issues all affect the conversion numbers directly.
-1. The same data is keyed into several systems, so Power BI can receive two versions of one number. This may explain why RA5 shows 37.9% for YCCJ/AL when our own calculation gives 31.0% or 54.5%.
-2. There are seven manual hand-offs on the recruitment path. The Enquirer to UnitE step sits exactly between applications and enrolments.
-3. UnitE sends data out automatically but gets it back by hand, and nothing says which system wins.
-4. Commercial students and apprentices may be missing from college totals, because Dante, Onefile, JTL and Dataserve are not connected to UnitE or the SQL connector.
-The medium-priority issues are about feeds that bypass the connector, partial bursary data, the lack of status history, and student systems we have not yet mapped.
-Possible causes (in italics) are my reading of the map and meeting notes; confirm them with each system owner. Most come back to two root causes: systems were bought team by team without automated links, and nobody owns the master copy of each data item.
-The single most useful next step is to agree one system of record for each key data item, as part of Lesley and Kevin's single source work.</a:t>
+              <a:t>Update: feeds into UnitE from Enquirer, Bursary, the Student Portal, FVC Portal and iTrent now run automatically through UnitE's data warehouse. That removes most manual hand-offs, so "manual input and load timing" drops to medium priority.
+The three high-priority issues:
+1. The same data is still held in several systems. UnitE is the master, but Power BI also reads Enquirer, TripleS and Bursary directly through the SQL connector, so two versions of one number can reach a report. This may explain why RA5 shows 37.9% for YCCJ/AL when our own calculation gives 31.0% or 54.5%.
+2. The warehouse load rules are not documented. How A/B sections are grouped and which statuses count as an offer are decided inside UnitE, so report pages can count differently (343 against about 422 offers) and nobody can explain why.
+3. Commercial students and apprentices may be missing from college totals, because Dante, Onefile, JTL and Dataserve are not connected to UnitE or the SQL connector.
+Possible causes (in italics) are my reading of the map and meeting notes; confirm them with each system owner.
+The most useful next step is to get the warehouse load rules from Kevin and agree one system of record for each key data item.</a:t>
             </a:r>
             <a:endParaRPr lang="en-US" dirty="0"/>
           </a:p>
@@ -948,7 +947,7 @@
                   <a:srgbClr val="1F2233"/>
                 </a:solidFill>
               </a:rPr>
-              <a:t>From the updated Lucid data architecture map: 8 issues, 4 high priority</a:t>
+              <a:t>From the updated Lucid data architecture map: 8 issues, 3 high priority (updated: feeds into UnitE now run through its data warehouse)</a:t>
             </a:r>
             <a:endParaRPr lang="en-US" sz="1300" dirty="0"/>
           </a:p>
@@ -1549,7 +1548,7 @@
                           <a:ea typeface="Calibri" pitchFamily="34" charset="-122"/>
                           <a:cs typeface="Calibri" pitchFamily="34" charset="-120"/>
                         </a:rPr>
-                        <a:t>Same data keyed into several systems</a:t>
+                        <a:t>Same data held in several systems</a:t>
                       </a:r>
                       <a:endParaRPr lang="en-US" sz="900" dirty="0">
                         <a:latin typeface="Calibri" charset="0"/>
@@ -1617,7 +1616,7 @@
                           <a:ea typeface="Calibri" pitchFamily="34" charset="-122"/>
                           <a:cs typeface="Calibri" pitchFamily="34" charset="-120"/>
                         </a:rPr>
-                        <a:t>ASN typed into Enquirer, FVC Portal and TripleS. Application status and interview detail typed into both Enquirer and UnitE</a:t>
+                        <a:t>ASN typed into Enquirer, FVC Portal and TripleS. UnitE is the master, but Enquirer, TripleS and Bursary also feed the SQL connector directly</a:t>
                       </a:r>
                       <a:endParaRPr lang="en-US" sz="900" dirty="0">
                         <a:latin typeface="Calibri" charset="0"/>
@@ -1685,7 +1684,7 @@
                           <a:ea typeface="Calibri" pitchFamily="34" charset="-122"/>
                           <a:cs typeface="Calibri" pitchFamily="34" charset="-120"/>
                         </a:rPr>
-                        <a:t>Each team works in its own system (admissions, registry, support, schools) and no one owns the master copy of each item</a:t>
+                        <a:t>Each team works in its own system; Power BI reads both UnitE and the source systems, so no single version wins</a:t>
                       </a:r>
                       <a:endParaRPr lang="en-US" sz="900" dirty="0">
                         <a:latin typeface="Calibri" charset="0"/>
@@ -1821,7 +1820,7 @@
                           <a:ea typeface="Calibri" pitchFamily="34" charset="-122"/>
                           <a:cs typeface="Calibri" pitchFamily="34" charset="-120"/>
                         </a:rPr>
-                        <a:t>Agree one system of record per data item (Lesley, Kevin)</a:t>
+                        <a:t>UnitE (via its warehouse) is master; check conflicts with direct SQL feeds (Kevin)</a:t>
                       </a:r>
                       <a:endParaRPr lang="en-US" sz="900" dirty="0">
                         <a:latin typeface="Calibri" charset="0"/>
@@ -2027,7 +2026,7 @@
                           <a:ea typeface="Calibri" pitchFamily="34" charset="-122"/>
                           <a:cs typeface="Calibri" pitchFamily="34" charset="-120"/>
                         </a:rPr>
-                        <a:t>Manual steps on the recruitment path</a:t>
+                        <a:t>UnitE warehouse rules not documented</a:t>
                       </a:r>
                       <a:endParaRPr lang="en-US" sz="900" dirty="0">
                         <a:latin typeface="Calibri" charset="0"/>
@@ -2095,7 +2094,7 @@
                           <a:ea typeface="Calibri" pitchFamily="34" charset="-122"/>
                           <a:cs typeface="Calibri" pitchFamily="34" charset="-120"/>
                         </a:rPr>
-                        <a:t>7 manual hand-offs, including Enquirer → UnitE, plus 6 manual input points</a:t>
+                        <a:t>All feeds into UnitE now run through UnitE's data warehouse (Enquirer, Bursary, Student Portal, FVC Portal, iTrent)</a:t>
                       </a:r>
                       <a:endParaRPr lang="en-US" sz="900" dirty="0">
                         <a:latin typeface="Calibri" charset="0"/>
@@ -2163,7 +2162,7 @@
                           <a:ea typeface="Calibri" pitchFamily="34" charset="-122"/>
                           <a:cs typeface="Calibri" pitchFamily="34" charset="-120"/>
                         </a:rPr>
-                        <a:t>No automated link was built between the systems, so re-keying became the routine workaround</a:t>
+                        <a:t>Load rules (A/B grouping, which statuses count as an offer, duplicates) sit inside UnitE and are not shared</a:t>
                       </a:r>
                       <a:endParaRPr lang="en-US" sz="900" dirty="0">
                         <a:latin typeface="Calibri" charset="0"/>
@@ -2231,7 +2230,7 @@
                           <a:ea typeface="Calibri" pitchFamily="34" charset="-122"/>
                           <a:cs typeface="Calibri" pitchFamily="34" charset="-120"/>
                         </a:rPr>
-                        <a:t>Delays, typing errors and missing records between applications and enrolments</a:t>
+                        <a:t>Report pages can count differently (343 vs ~422 offers) and nobody can explain why</a:t>
                       </a:r>
                       <a:endParaRPr lang="en-US" sz="900" dirty="0">
                         <a:latin typeface="Calibri" charset="0"/>
@@ -2299,7 +2298,7 @@
                           <a:ea typeface="Calibri" pitchFamily="34" charset="-122"/>
                           <a:cs typeface="Calibri" pitchFamily="34" charset="-120"/>
                         </a:rPr>
-                        <a:t>Monthly count check: Enquirer vs UnitE vs RA5, starting with YCCJ/AL</a:t>
+                        <a:t>Ask Kevin for the warehouse load rules and schedule; add them to the definitions sheet</a:t>
                       </a:r>
                       <a:endParaRPr lang="en-US" sz="900" dirty="0">
                         <a:latin typeface="Calibri" charset="0"/>
@@ -2505,7 +2504,7 @@
                           <a:ea typeface="Calibri" pitchFamily="34" charset="-122"/>
                           <a:cs typeface="Calibri" pitchFamily="34" charset="-120"/>
                         </a:rPr>
-                        <a:t>Two-way loops around UnitE</a:t>
+                        <a:t>Students missing from UnitE or BI</a:t>
                       </a:r>
                       <a:endParaRPr lang="en-US" sz="900" dirty="0">
                         <a:latin typeface="Calibri" charset="0"/>
@@ -2573,7 +2572,7 @@
                           <a:ea typeface="Calibri" pitchFamily="34" charset="-122"/>
                           <a:cs typeface="Calibri" pitchFamily="34" charset="-120"/>
                         </a:rPr>
-                        <a:t>UnitE sends data out automatically; Enquirer, Bursary, Student Portal and FVC Portal send it back by hand</a:t>
+                        <a:t>Dante "not on Unit-E" and not on the connector. Onefile, JTL and Dataserve unconnected. Celcat not on the connector</a:t>
                       </a:r>
                       <a:endParaRPr lang="en-US" sz="900" dirty="0">
                         <a:latin typeface="Calibri" charset="0"/>
@@ -2641,7 +2640,7 @@
                           <a:ea typeface="Calibri" pitchFamily="34" charset="-122"/>
                           <a:cs typeface="Calibri" pitchFamily="34" charset="-120"/>
                         </a:rPr>
-                        <a:t>Other systems need to correct or add data but have no write-back link to UnitE</a:t>
+                        <a:t>Commercial and apprenticeship courses run on separate systems with their own processes; BI was built around UnitE and Enquirer</a:t>
                       </a:r>
                       <a:endParaRPr lang="en-US" sz="900" dirty="0">
                         <a:latin typeface="Calibri" charset="0"/>
@@ -2709,7 +2708,7 @@
                           <a:ea typeface="Calibri" pitchFamily="34" charset="-122"/>
                           <a:cs typeface="Calibri" pitchFamily="34" charset="-120"/>
                         </a:rPr>
-                        <a:t>No rule for which system wins; Power BI reads both UnitE and Enquirer</a:t>
+                        <a:t>Totals may quietly leave out commercial students and apprentices</a:t>
                       </a:r>
                       <a:endParaRPr lang="en-US" sz="900" dirty="0">
                         <a:latin typeface="Calibri" charset="0"/>
@@ -2777,7 +2776,7 @@
                           <a:ea typeface="Calibri" pitchFamily="34" charset="-122"/>
                           <a:cs typeface="Calibri" pitchFamily="34" charset="-120"/>
                         </a:rPr>
-                        <a:t>Covered by the system-of-record agreement (Lesley, Kevin)</a:t>
+                        <a:t>Ask Kevin which systems can join the UnitE warehouse or SQL connector</a:t>
                       </a:r>
                       <a:endParaRPr lang="en-US" sz="900" dirty="0">
                         <a:latin typeface="Calibri" charset="0"/>
@@ -2983,7 +2982,7 @@
                           <a:ea typeface="Calibri" pitchFamily="34" charset="-122"/>
                           <a:cs typeface="Calibri" pitchFamily="34" charset="-120"/>
                         </a:rPr>
-                        <a:t>Students missing from UnitE or BI</a:t>
+                        <a:t>Manual input and load timing</a:t>
                       </a:r>
                       <a:endParaRPr lang="en-US" sz="900" dirty="0">
                         <a:latin typeface="Calibri" charset="0"/>
@@ -3051,7 +3050,7 @@
                           <a:ea typeface="Calibri" pitchFamily="34" charset="-122"/>
                           <a:cs typeface="Calibri" pitchFamily="34" charset="-120"/>
                         </a:rPr>
-                        <a:t>Dante "not on Unit-E" and not on the connector. Onefile, JTL and Dataserve unconnected. Celcat not on the connector</a:t>
+                        <a:t>2 manual hand-offs remain (Online Service → Enquirer, Dante → Enquirer) plus 7 manual input points</a:t>
                       </a:r>
                       <a:endParaRPr lang="en-US" sz="900" dirty="0">
                         <a:latin typeface="Calibri" charset="0"/>
@@ -3119,7 +3118,7 @@
                           <a:ea typeface="Calibri" pitchFamily="34" charset="-122"/>
                           <a:cs typeface="Calibri" pitchFamily="34" charset="-120"/>
                         </a:rPr>
-                        <a:t>Commercial and apprenticeship courses run on separate systems with their own processes; BI was built around UnitE and Enquirer</a:t>
+                        <a:t>The warehouse automates loads into UnitE, but applications and staff-entered details are still keyed by hand</a:t>
                       </a:r>
                       <a:endParaRPr lang="en-US" sz="900" dirty="0">
                         <a:latin typeface="Calibri" charset="0"/>
@@ -3187,7 +3186,7 @@
                           <a:ea typeface="Calibri" pitchFamily="34" charset="-122"/>
                           <a:cs typeface="Calibri" pitchFamily="34" charset="-120"/>
                         </a:rPr>
-                        <a:t>Totals may quietly leave out commercial students and apprentices</a:t>
+                        <a:t>Typing errors at entry flow everywhere; pages refreshed at different times disagree (YCCJ/AL (B): 14 vs 17)</a:t>
                       </a:r>
                       <a:endParaRPr lang="en-US" sz="900" dirty="0">
                         <a:latin typeface="Calibri" charset="0"/>
@@ -3255,7 +3254,7 @@
                           <a:ea typeface="Calibri" pitchFamily="34" charset="-122"/>
                           <a:cs typeface="Calibri" pitchFamily="34" charset="-120"/>
                         </a:rPr>
-                        <a:t>Ask Kevin which systems can join the SQL connector</a:t>
+                        <a:t>Confirm load timing and failure alerts (Kevin); monthly count check, starting with YCCJ/AL</a:t>
                       </a:r>
                       <a:endParaRPr lang="en-US" sz="900" dirty="0">
                         <a:latin typeface="Calibri" charset="0"/>
@@ -3317,13 +3316,13 @@
                       <a:r>
                         <a:rPr lang="en-US" sz="900" b="1" dirty="0">
                           <a:solidFill>
-                            <a:srgbClr val="8C1A5C"/>
-                          </a:solidFill>
-                          <a:latin typeface="Calibri" pitchFamily="34" charset="0"/>
-                          <a:ea typeface="Calibri" pitchFamily="34" charset="-122"/>
-                          <a:cs typeface="Calibri" pitchFamily="34" charset="-120"/>
-                        </a:rPr>
-                        <a:t>High</a:t>
+                            <a:srgbClr val="8A4B0F"/>
+                          </a:solidFill>
+                          <a:latin typeface="Calibri" pitchFamily="34" charset="0"/>
+                          <a:ea typeface="Calibri" pitchFamily="34" charset="-122"/>
+                          <a:cs typeface="Calibri" pitchFamily="34" charset="-120"/>
+                        </a:rPr>
+                        <a:t>Medium</a:t>
                       </a:r>
                       <a:endParaRPr lang="en-US" sz="900" dirty="0">
                         <a:latin typeface="Calibri" charset="0"/>
@@ -3370,7 +3369,7 @@
                       <a:tailEnd type="none" w="med" len="med"/>
                     </a:lnB>
                     <a:solidFill>
-                      <a:srgbClr val="F6D6E6"/>
+                      <a:srgbClr val="FCEBD3"/>
                     </a:solidFill>
                   </a:tcPr>
                 </a:tc>
@@ -4689,7 +4688,7 @@
                           <a:ea typeface="Calibri" pitchFamily="34" charset="-122"/>
                           <a:cs typeface="Calibri" pitchFamily="34" charset="-120"/>
                         </a:rPr>
-                        <a:t>Start weekly status snapshots now (Lesley)</a:t>
+                        <a:t>Check if the UnitE warehouse keeps history; if not, start weekly snapshots (Lesley)</a:t>
                       </a:r>
                       <a:endParaRPr lang="en-US" sz="900" dirty="0">
                         <a:latin typeface="Calibri" charset="0"/>
@@ -5321,7 +5320,7 @@
                   <a:srgbClr val="6B6F80"/>
                 </a:solidFill>
               </a:rPr>
-              <a:t>Source: System Architecture working file (Lucid), checked 6 Oct 2026. Causes are likely explanations to confirm with system owners. Line labels were matched to lines by position on the page.</a:t>
+              <a:t>Source: System Architecture working file (Lucid), updated 6 Oct 2026. Causes are likely explanations to confirm with system owners. Line labels were matched to lines by position on the page.</a:t>
             </a:r>
             <a:endParaRPr lang="en-US" sz="900" dirty="0"/>
           </a:p>
